--- a/Quadro_Aulas_Report_2026-06-24.pptx
+++ b/Quadro_Aulas_Report_2026-06-24.pptx
@@ -1038,7 +1038,7 @@
                   <a:srgbClr val="8FA3C0"/>
                 </a:solidFill>
               </a:rPr>
-              <a:t>24 de Junho de 2026 as 08:37</a:t>
+              <a:t>24 de Junho de 2026 as 12:22</a:t>
             </a:r>
             <a:endParaRPr lang="en-US" sz="700" dirty="0"/>
           </a:p>
@@ -2299,7 +2299,7 @@
                   <a:srgbClr val="222222"/>
                 </a:solidFill>
               </a:rPr>
-              <a:t>Est: 427.5h . Real: 525.3h . Rem: 27.5h</a:t>
+              <a:t>Est: 427.5h . Real: 526.8h . Rem: 27.5h</a:t>
             </a:r>
             <a:endParaRPr lang="en-US" sz="750" dirty="0"/>
           </a:p>
@@ -2507,7 +2507,7 @@
                   <a:srgbClr val="DC2626"/>
                 </a:solidFill>
               </a:rPr>
-              <a:t>Projetado: 552.8h (+125.3h / +29%)</a:t>
+              <a:t>Projetado: 554.3h (+126.8h / +30%)</a:t>
             </a:r>
             <a:endParaRPr lang="en-US" sz="800" dirty="0"/>
           </a:p>
@@ -2640,7 +2640,7 @@
                   <a:srgbClr val="DC2626"/>
                 </a:solidFill>
               </a:rPr>
-              <a:t>+1.5h (+150%)</a:t>
+              <a:t>+3h (+300%)</a:t>
             </a:r>
             <a:endParaRPr lang="en-US" sz="700" dirty="0"/>
           </a:p>
@@ -3767,7 +3767,7 @@
                   <a:srgbClr val="D97706"/>
                 </a:solidFill>
               </a:rPr>
-              <a:t>1266.9h</a:t>
+              <a:t>1268.4h</a:t>
             </a:r>
             <a:endParaRPr lang="en-US" sz="2400" dirty="0"/>
           </a:p>
@@ -4033,7 +4033,7 @@
                   <a:srgbClr val="D97706"/>
                 </a:solidFill>
               </a:rPr>
-              <a:t>+155.4h</a:t>
+              <a:t>+156.9h</a:t>
             </a:r>
             <a:endParaRPr lang="en-US" sz="2400" dirty="0"/>
           </a:p>
@@ -4069,7 +4069,7 @@
                   <a:srgbClr val="888888"/>
                 </a:solidFill>
               </a:rPr>
-              <a:t>projetado: 1406.4h (+12%)</a:t>
+              <a:t>projetado: 1407.9h (+13%)</a:t>
             </a:r>
             <a:endParaRPr lang="en-US" sz="700" dirty="0"/>
           </a:p>
@@ -4084,7 +4084,7 @@
         <p:spPr>
           <a:xfrm>
             <a:off x="2441448" y="2916936"/>
-            <a:ext cx="8690048" cy="54864"/>
+            <a:ext cx="8691067" cy="54864"/>
           </a:xfrm>
           <a:prstGeom prst="rect">
             <a:avLst/>
@@ -4108,8 +4108,8 @@
         </p:nvSpPr>
         <p:spPr>
           <a:xfrm>
-            <a:off x="11131496" y="2916936"/>
-            <a:ext cx="956872" cy="54864"/>
+            <a:off x="11132515" y="2916936"/>
+            <a:ext cx="955853" cy="54864"/>
           </a:xfrm>
           <a:prstGeom prst="rect">
             <a:avLst/>
@@ -5853,7 +5853,7 @@
                   <a:srgbClr val="222222"/>
                 </a:solidFill>
               </a:rPr>
-              <a:t>#404989 +1.5h(+150%) [RICARDO FERNANDES CARDOSO]</a:t>
+              <a:t>#404989 +3h(+300%) [RICARDO FERNANDES CARDOSO]</a:t>
             </a:r>
             <a:endParaRPr lang="en-US" sz="750" dirty="0"/>
           </a:p>
@@ -8444,7 +8444,7 @@
         <p:spPr>
           <a:xfrm>
             <a:off x="11009376" y="6153912"/>
-            <a:ext cx="871220" cy="73152"/>
+            <a:ext cx="881888" cy="73152"/>
           </a:xfrm>
           <a:prstGeom prst="rect">
             <a:avLst/>
@@ -8490,7 +8490,7 @@
                   <a:srgbClr val="1D9E75"/>
                 </a:solidFill>
               </a:rPr>
-              <a:t>122.5h · 87 subs finalizadas</a:t>
+              <a:t>124h · 87 subs finalizadas</a:t>
             </a:r>
             <a:endParaRPr lang="en-US" sz="950" dirty="0"/>
           </a:p>

--- a/Quadro_Aulas_Report_2026-06-24.pptx
+++ b/Quadro_Aulas_Report_2026-06-24.pptx
@@ -1038,7 +1038,7 @@
                   <a:srgbClr val="8FA3C0"/>
                 </a:solidFill>
               </a:rPr>
-              <a:t>24 de Junho de 2026 as 12:22</a:t>
+              <a:t>24 de Junho de 2026 as 14:32</a:t>
             </a:r>
             <a:endParaRPr lang="en-US" sz="700" dirty="0"/>
           </a:p>

--- a/Quadro_Aulas_Report_2026-06-24.pptx
+++ b/Quadro_Aulas_Report_2026-06-24.pptx
@@ -1038,7 +1038,7 @@
                   <a:srgbClr val="8FA3C0"/>
                 </a:solidFill>
               </a:rPr>
-              <a:t>24 de Junho de 2026 as 14:32</a:t>
+              <a:t>24 de Junho de 2026 as 16:56</a:t>
             </a:r>
             <a:endParaRPr lang="en-US" sz="700" dirty="0"/>
           </a:p>
@@ -1207,7 +1207,7 @@
                   <a:srgbClr val="4ADE80"/>
                 </a:solidFill>
               </a:rPr>
-              <a:t>325</a:t>
+              <a:t>327</a:t>
             </a:r>
             <a:endParaRPr lang="en-US" sz="2400" dirty="0"/>
           </a:p>
@@ -1351,7 +1351,7 @@
                   <a:srgbClr val="F87171"/>
                 </a:solidFill>
               </a:rPr>
-              <a:t>42</a:t>
+              <a:t>41</a:t>
             </a:r>
             <a:endParaRPr lang="en-US" sz="2400" dirty="0"/>
           </a:p>
@@ -1427,7 +1427,7 @@
         <p:spPr>
           <a:xfrm>
             <a:off x="137160" y="3538728"/>
-            <a:ext cx="1687068" cy="91440"/>
+            <a:ext cx="1707642" cy="91440"/>
           </a:xfrm>
           <a:prstGeom prst="rect">
             <a:avLst/>
@@ -1473,7 +1473,7 @@
                   <a:srgbClr val="8FA3C0"/>
                 </a:solidFill>
               </a:rPr>
-              <a:t>82% concluido  .  325 de 394 itens</a:t>
+              <a:t>83% concluido  .  327 de 394 itens</a:t>
             </a:r>
             <a:endParaRPr lang="en-US" sz="700" dirty="0"/>
           </a:p>
@@ -2263,7 +2263,7 @@
                   <a:srgbClr val="222222"/>
                 </a:solidFill>
               </a:rPr>
-              <a:t>A Fazer: 12 . Em progresso: 1 . Finalizados: 98</a:t>
+              <a:t>A Fazer: 11 . Em progresso: 1 . Finalizados: 99</a:t>
             </a:r>
             <a:endParaRPr lang="en-US" sz="750" dirty="0"/>
           </a:p>
@@ -2339,7 +2339,7 @@
         <p:spPr>
           <a:xfrm>
             <a:off x="4946904" y="859536"/>
-            <a:ext cx="1608704" cy="50292"/>
+            <a:ext cx="1807037" cy="50292"/>
           </a:xfrm>
           <a:prstGeom prst="rect">
             <a:avLst/>
@@ -2385,7 +2385,7 @@
                   <a:srgbClr val="888888"/>
                 </a:solidFill>
               </a:rPr>
-              <a:t>Stories/NFTs: 73% · 8 de 11</a:t>
+              <a:t>Stories/NFTs: 82% · 9 de 11</a:t>
             </a:r>
             <a:endParaRPr lang="en-US" sz="650" dirty="0"/>
           </a:p>
@@ -2425,7 +2425,7 @@
         <p:spPr>
           <a:xfrm>
             <a:off x="4946904" y="1033272"/>
-            <a:ext cx="1939260" cy="50292"/>
+            <a:ext cx="1961297" cy="50292"/>
           </a:xfrm>
           <a:prstGeom prst="rect">
             <a:avLst/>
@@ -2471,7 +2471,7 @@
                   <a:srgbClr val="888888"/>
                 </a:solidFill>
               </a:rPr>
-              <a:t>Subs: 88% · 98 de 111</a:t>
+              <a:t>Subs: 89% · 99 de 111</a:t>
             </a:r>
             <a:endParaRPr lang="en-US" sz="650" dirty="0"/>
           </a:p>
@@ -2515,140 +2515,7 @@
       </p:sp>
       <p:sp>
         <p:nvSpPr>
-          <p:cNvPr id="52" name="Text 50"/>
-          <p:cNvSpPr/>
-          <p:nvPr/>
-        </p:nvSpPr>
-        <p:spPr>
-          <a:xfrm>
-            <a:off x="4946904" y="1417320"/>
-            <a:ext cx="2203704" cy="146304"/>
-          </a:xfrm>
-          <a:prstGeom prst="rect">
-            <a:avLst/>
-          </a:prstGeom>
-          <a:noFill/>
-          <a:ln/>
-        </p:spPr>
-        <p:txBody>
-          <a:bodyPr wrap="square" lIns="0" tIns="0" rIns="0" bIns="0" rtlCol="0" anchor="ctr"/>
-          <a:lstStyle/>
-          <a:p>
-            <a:pPr algn="l" indent="0" marL="0">
-              <a:buNone/>
-            </a:pPr>
-            <a:r>
-              <a:rPr lang="en-US" sz="750" b="1" dirty="0">
-                <a:solidFill>
-                  <a:srgbClr val="534AB7"/>
-                </a:solidFill>
-              </a:rPr>
-              <a:t>1 ativo(s) com horas estouradas</a:t>
-            </a:r>
-            <a:endParaRPr lang="en-US" sz="750" dirty="0"/>
-          </a:p>
-        </p:txBody>
-      </p:sp>
-      <p:sp>
-        <p:nvSpPr>
-          <p:cNvPr id="53" name="Shape 51"/>
-          <p:cNvSpPr/>
-          <p:nvPr/>
-        </p:nvSpPr>
-        <p:spPr>
-          <a:xfrm>
-            <a:off x="4946904" y="1581912"/>
-            <a:ext cx="2203704" cy="448056"/>
-          </a:xfrm>
-          <a:prstGeom prst="rect">
-            <a:avLst/>
-          </a:prstGeom>
-          <a:solidFill>
-            <a:srgbClr val="FFF8F8"/>
-          </a:solidFill>
-          <a:ln w="12700">
-            <a:solidFill>
-              <a:srgbClr val="FCA5A5"/>
-            </a:solidFill>
-            <a:prstDash val="solid"/>
-          </a:ln>
-        </p:spPr>
-      </p:sp>
-      <p:sp>
-        <p:nvSpPr>
-          <p:cNvPr id="54" name="Text 52"/>
-          <p:cNvSpPr/>
-          <p:nvPr/>
-        </p:nvSpPr>
-        <p:spPr>
-          <a:xfrm>
-            <a:off x="4965192" y="1600200"/>
-            <a:ext cx="2167128" cy="128016"/>
-          </a:xfrm>
-          <a:prstGeom prst="rect">
-            <a:avLst/>
-          </a:prstGeom>
-          <a:noFill/>
-          <a:ln/>
-        </p:spPr>
-        <p:txBody>
-          <a:bodyPr wrap="square" lIns="0" tIns="0" rIns="0" bIns="0" rtlCol="0" anchor="ctr"/>
-          <a:lstStyle/>
-          <a:p>
-            <a:pPr algn="l" indent="0" marL="0">
-              <a:buNone/>
-            </a:pPr>
-            <a:r>
-              <a:rPr lang="en-US" sz="650" dirty="0">
-                <a:solidFill>
-                  <a:srgbClr val="222222"/>
-                </a:solidFill>
-              </a:rPr>
-              <a:t>Publicação</a:t>
-            </a:r>
-            <a:endParaRPr lang="en-US" sz="650" dirty="0"/>
-          </a:p>
-        </p:txBody>
-      </p:sp>
-      <p:sp>
-        <p:nvSpPr>
-          <p:cNvPr id="55" name="Text 53"/>
-          <p:cNvSpPr/>
-          <p:nvPr/>
-        </p:nvSpPr>
-        <p:spPr>
-          <a:xfrm>
-            <a:off x="4965192" y="1728216"/>
-            <a:ext cx="2167128" cy="128016"/>
-          </a:xfrm>
-          <a:prstGeom prst="rect">
-            <a:avLst/>
-          </a:prstGeom>
-          <a:noFill/>
-          <a:ln/>
-        </p:spPr>
-        <p:txBody>
-          <a:bodyPr wrap="square" lIns="0" tIns="0" rIns="0" bIns="0" rtlCol="0" anchor="ctr"/>
-          <a:lstStyle/>
-          <a:p>
-            <a:pPr algn="l" indent="0" marL="0">
-              <a:buNone/>
-            </a:pPr>
-            <a:r>
-              <a:rPr lang="en-US" sz="700" b="1" dirty="0">
-                <a:solidFill>
-                  <a:srgbClr val="DC2626"/>
-                </a:solidFill>
-              </a:rPr>
-              <a:t>+3h (+300%)</a:t>
-            </a:r>
-            <a:endParaRPr lang="en-US" sz="700" dirty="0"/>
-          </a:p>
-        </p:txBody>
-      </p:sp>
-      <p:sp>
-        <p:nvSpPr>
-          <p:cNvPr id="56" name="Shape 54"/>
+          <p:cNvPr id="52" name="Shape 50"/>
           <p:cNvSpPr/>
           <p:nvPr/>
         </p:nvSpPr>
@@ -2673,7 +2540,7 @@
       </p:sp>
       <p:sp>
         <p:nvSpPr>
-          <p:cNvPr id="57" name="Text 55"/>
+          <p:cNvPr id="53" name="Text 51"/>
           <p:cNvSpPr/>
           <p:nvPr/>
         </p:nvSpPr>
@@ -2709,7 +2576,7 @@
       </p:sp>
       <p:sp>
         <p:nvSpPr>
-          <p:cNvPr id="58" name="Text 56"/>
+          <p:cNvPr id="54" name="Text 52"/>
           <p:cNvSpPr/>
           <p:nvPr/>
         </p:nvSpPr>
@@ -2745,7 +2612,7 @@
       </p:sp>
       <p:sp>
         <p:nvSpPr>
-          <p:cNvPr id="59" name="Shape 57"/>
+          <p:cNvPr id="55" name="Shape 53"/>
           <p:cNvSpPr/>
           <p:nvPr/>
         </p:nvSpPr>
@@ -2777,7 +2644,7 @@
       </p:sp>
       <p:sp>
         <p:nvSpPr>
-          <p:cNvPr id="60" name="Text 58"/>
+          <p:cNvPr id="56" name="Text 54"/>
           <p:cNvSpPr/>
           <p:nvPr/>
         </p:nvSpPr>
@@ -2813,7 +2680,7 @@
       </p:sp>
       <p:sp>
         <p:nvSpPr>
-          <p:cNvPr id="61" name="Text 59"/>
+          <p:cNvPr id="57" name="Text 55"/>
           <p:cNvSpPr/>
           <p:nvPr/>
         </p:nvSpPr>
@@ -2849,7 +2716,7 @@
       </p:sp>
       <p:sp>
         <p:nvSpPr>
-          <p:cNvPr id="62" name="Text 60"/>
+          <p:cNvPr id="58" name="Text 56"/>
           <p:cNvSpPr/>
           <p:nvPr/>
         </p:nvSpPr>
@@ -2885,7 +2752,7 @@
       </p:sp>
       <p:sp>
         <p:nvSpPr>
-          <p:cNvPr id="63" name="Shape 61"/>
+          <p:cNvPr id="59" name="Shape 57"/>
           <p:cNvSpPr/>
           <p:nvPr/>
         </p:nvSpPr>
@@ -2910,7 +2777,7 @@
       </p:sp>
       <p:sp>
         <p:nvSpPr>
-          <p:cNvPr id="64" name="Shape 62"/>
+          <p:cNvPr id="60" name="Shape 58"/>
           <p:cNvSpPr/>
           <p:nvPr/>
         </p:nvSpPr>
@@ -2935,7 +2802,7 @@
       </p:sp>
       <p:sp>
         <p:nvSpPr>
-          <p:cNvPr id="65" name="Text 63"/>
+          <p:cNvPr id="61" name="Text 59"/>
           <p:cNvSpPr/>
           <p:nvPr/>
         </p:nvSpPr>
@@ -2971,7 +2838,7 @@
       </p:sp>
       <p:sp>
         <p:nvSpPr>
-          <p:cNvPr id="66" name="Shape 64"/>
+          <p:cNvPr id="62" name="Shape 60"/>
           <p:cNvSpPr/>
           <p:nvPr/>
         </p:nvSpPr>
@@ -2996,7 +2863,7 @@
       </p:sp>
       <p:sp>
         <p:nvSpPr>
-          <p:cNvPr id="67" name="Shape 65"/>
+          <p:cNvPr id="63" name="Shape 61"/>
           <p:cNvSpPr/>
           <p:nvPr/>
         </p:nvSpPr>
@@ -3021,7 +2888,7 @@
       </p:sp>
       <p:sp>
         <p:nvSpPr>
-          <p:cNvPr id="68" name="Text 66"/>
+          <p:cNvPr id="64" name="Text 62"/>
           <p:cNvSpPr/>
           <p:nvPr/>
         </p:nvSpPr>
@@ -3057,7 +2924,7 @@
       </p:sp>
       <p:sp>
         <p:nvSpPr>
-          <p:cNvPr id="69" name="Text 67"/>
+          <p:cNvPr id="65" name="Text 63"/>
           <p:cNvSpPr/>
           <p:nvPr/>
         </p:nvSpPr>
@@ -3093,7 +2960,7 @@
       </p:sp>
       <p:sp>
         <p:nvSpPr>
-          <p:cNvPr id="70" name="Shape 68"/>
+          <p:cNvPr id="66" name="Shape 64"/>
           <p:cNvSpPr/>
           <p:nvPr/>
         </p:nvSpPr>
@@ -3118,7 +2985,7 @@
       </p:sp>
       <p:sp>
         <p:nvSpPr>
-          <p:cNvPr id="71" name="Text 69"/>
+          <p:cNvPr id="67" name="Text 65"/>
           <p:cNvSpPr/>
           <p:nvPr/>
         </p:nvSpPr>
@@ -3154,7 +3021,7 @@
       </p:sp>
       <p:sp>
         <p:nvSpPr>
-          <p:cNvPr id="72" name="Shape 70"/>
+          <p:cNvPr id="68" name="Shape 66"/>
           <p:cNvSpPr/>
           <p:nvPr/>
         </p:nvSpPr>
@@ -3186,7 +3053,7 @@
       </p:sp>
       <p:sp>
         <p:nvSpPr>
-          <p:cNvPr id="73" name="Text 71"/>
+          <p:cNvPr id="69" name="Text 67"/>
           <p:cNvSpPr/>
           <p:nvPr/>
         </p:nvSpPr>
@@ -3222,7 +3089,7 @@
       </p:sp>
       <p:sp>
         <p:nvSpPr>
-          <p:cNvPr id="74" name="Text 72"/>
+          <p:cNvPr id="70" name="Text 68"/>
           <p:cNvSpPr/>
           <p:nvPr/>
         </p:nvSpPr>
@@ -3258,7 +3125,7 @@
       </p:sp>
       <p:sp>
         <p:nvSpPr>
-          <p:cNvPr id="75" name="Text 73"/>
+          <p:cNvPr id="71" name="Text 69"/>
           <p:cNvSpPr/>
           <p:nvPr/>
         </p:nvSpPr>
@@ -3294,7 +3161,7 @@
       </p:sp>
       <p:sp>
         <p:nvSpPr>
-          <p:cNvPr id="76" name="Shape 74"/>
+          <p:cNvPr id="72" name="Shape 70"/>
           <p:cNvSpPr/>
           <p:nvPr/>
         </p:nvSpPr>
@@ -3319,7 +3186,7 @@
       </p:sp>
       <p:sp>
         <p:nvSpPr>
-          <p:cNvPr id="77" name="Shape 75"/>
+          <p:cNvPr id="73" name="Shape 71"/>
           <p:cNvSpPr/>
           <p:nvPr/>
         </p:nvSpPr>
@@ -3344,7 +3211,7 @@
       </p:sp>
       <p:sp>
         <p:nvSpPr>
-          <p:cNvPr id="78" name="Text 76"/>
+          <p:cNvPr id="74" name="Text 72"/>
           <p:cNvSpPr/>
           <p:nvPr/>
         </p:nvSpPr>
@@ -3380,7 +3247,7 @@
       </p:sp>
       <p:sp>
         <p:nvSpPr>
-          <p:cNvPr id="79" name="Shape 77"/>
+          <p:cNvPr id="75" name="Shape 73"/>
           <p:cNvSpPr/>
           <p:nvPr/>
         </p:nvSpPr>
@@ -3405,7 +3272,7 @@
       </p:sp>
       <p:sp>
         <p:nvSpPr>
-          <p:cNvPr id="80" name="Shape 78"/>
+          <p:cNvPr id="76" name="Shape 74"/>
           <p:cNvSpPr/>
           <p:nvPr/>
         </p:nvSpPr>
@@ -3430,7 +3297,7 @@
       </p:sp>
       <p:sp>
         <p:nvSpPr>
-          <p:cNvPr id="81" name="Text 79"/>
+          <p:cNvPr id="77" name="Text 75"/>
           <p:cNvSpPr/>
           <p:nvPr/>
         </p:nvSpPr>
@@ -3466,7 +3333,7 @@
       </p:sp>
       <p:sp>
         <p:nvSpPr>
-          <p:cNvPr id="82" name="Text 80"/>
+          <p:cNvPr id="78" name="Text 76"/>
           <p:cNvSpPr/>
           <p:nvPr/>
         </p:nvSpPr>
@@ -3502,7 +3369,7 @@
       </p:sp>
       <p:sp>
         <p:nvSpPr>
-          <p:cNvPr id="83" name="Shape 81"/>
+          <p:cNvPr id="79" name="Shape 77"/>
           <p:cNvSpPr/>
           <p:nvPr/>
         </p:nvSpPr>
@@ -3534,7 +3401,7 @@
       </p:sp>
       <p:sp>
         <p:nvSpPr>
-          <p:cNvPr id="84" name="Text 82"/>
+          <p:cNvPr id="80" name="Text 78"/>
           <p:cNvSpPr/>
           <p:nvPr/>
         </p:nvSpPr>
@@ -3570,7 +3437,7 @@
       </p:sp>
       <p:sp>
         <p:nvSpPr>
-          <p:cNvPr id="85" name="Text 83"/>
+          <p:cNvPr id="81" name="Text 79"/>
           <p:cNvSpPr/>
           <p:nvPr/>
         </p:nvSpPr>
@@ -3606,7 +3473,7 @@
       </p:sp>
       <p:sp>
         <p:nvSpPr>
-          <p:cNvPr id="86" name="Text 84"/>
+          <p:cNvPr id="82" name="Text 80"/>
           <p:cNvSpPr/>
           <p:nvPr/>
         </p:nvSpPr>
@@ -3642,7 +3509,7 @@
       </p:sp>
       <p:sp>
         <p:nvSpPr>
-          <p:cNvPr id="87" name="Text 85"/>
+          <p:cNvPr id="83" name="Text 81"/>
           <p:cNvSpPr/>
           <p:nvPr/>
         </p:nvSpPr>
@@ -3678,7 +3545,7 @@
       </p:sp>
       <p:sp>
         <p:nvSpPr>
-          <p:cNvPr id="88" name="Shape 86"/>
+          <p:cNvPr id="84" name="Shape 82"/>
           <p:cNvSpPr/>
           <p:nvPr/>
         </p:nvSpPr>
@@ -3703,7 +3570,7 @@
       </p:sp>
       <p:sp>
         <p:nvSpPr>
-          <p:cNvPr id="89" name="Text 87"/>
+          <p:cNvPr id="85" name="Text 83"/>
           <p:cNvSpPr/>
           <p:nvPr/>
         </p:nvSpPr>
@@ -3739,7 +3606,7 @@
       </p:sp>
       <p:sp>
         <p:nvSpPr>
-          <p:cNvPr id="90" name="Text 88"/>
+          <p:cNvPr id="86" name="Text 84"/>
           <p:cNvSpPr/>
           <p:nvPr/>
         </p:nvSpPr>
@@ -3775,7 +3642,7 @@
       </p:sp>
       <p:sp>
         <p:nvSpPr>
-          <p:cNvPr id="91" name="Text 89"/>
+          <p:cNvPr id="87" name="Text 85"/>
           <p:cNvSpPr/>
           <p:nvPr/>
         </p:nvSpPr>
@@ -3811,7 +3678,7 @@
       </p:sp>
       <p:sp>
         <p:nvSpPr>
-          <p:cNvPr id="92" name="Shape 90"/>
+          <p:cNvPr id="88" name="Shape 86"/>
           <p:cNvSpPr/>
           <p:nvPr/>
         </p:nvSpPr>
@@ -3836,7 +3703,7 @@
       </p:sp>
       <p:sp>
         <p:nvSpPr>
-          <p:cNvPr id="93" name="Text 91"/>
+          <p:cNvPr id="89" name="Text 87"/>
           <p:cNvSpPr/>
           <p:nvPr/>
         </p:nvSpPr>
@@ -3872,7 +3739,7 @@
       </p:sp>
       <p:sp>
         <p:nvSpPr>
-          <p:cNvPr id="94" name="Text 92"/>
+          <p:cNvPr id="90" name="Text 88"/>
           <p:cNvSpPr/>
           <p:nvPr/>
         </p:nvSpPr>
@@ -3908,7 +3775,7 @@
       </p:sp>
       <p:sp>
         <p:nvSpPr>
-          <p:cNvPr id="95" name="Text 93"/>
+          <p:cNvPr id="91" name="Text 89"/>
           <p:cNvSpPr/>
           <p:nvPr/>
         </p:nvSpPr>
@@ -3944,7 +3811,7 @@
       </p:sp>
       <p:sp>
         <p:nvSpPr>
-          <p:cNvPr id="96" name="Shape 94"/>
+          <p:cNvPr id="92" name="Shape 90"/>
           <p:cNvSpPr/>
           <p:nvPr/>
         </p:nvSpPr>
@@ -3969,7 +3836,7 @@
       </p:sp>
       <p:sp>
         <p:nvSpPr>
-          <p:cNvPr id="97" name="Text 95"/>
+          <p:cNvPr id="93" name="Text 91"/>
           <p:cNvSpPr/>
           <p:nvPr/>
         </p:nvSpPr>
@@ -4005,7 +3872,7 @@
       </p:sp>
       <p:sp>
         <p:nvSpPr>
-          <p:cNvPr id="98" name="Text 96"/>
+          <p:cNvPr id="94" name="Text 92"/>
           <p:cNvSpPr/>
           <p:nvPr/>
         </p:nvSpPr>
@@ -4041,7 +3908,7 @@
       </p:sp>
       <p:sp>
         <p:nvSpPr>
-          <p:cNvPr id="99" name="Text 97"/>
+          <p:cNvPr id="95" name="Text 93"/>
           <p:cNvSpPr/>
           <p:nvPr/>
         </p:nvSpPr>
@@ -4077,7 +3944,7 @@
       </p:sp>
       <p:sp>
         <p:nvSpPr>
-          <p:cNvPr id="100" name="Shape 98"/>
+          <p:cNvPr id="96" name="Shape 94"/>
           <p:cNvSpPr/>
           <p:nvPr/>
         </p:nvSpPr>
@@ -4102,7 +3969,7 @@
       </p:sp>
       <p:sp>
         <p:nvSpPr>
-          <p:cNvPr id="101" name="Shape 99"/>
+          <p:cNvPr id="97" name="Shape 95"/>
           <p:cNvSpPr/>
           <p:nvPr/>
         </p:nvSpPr>
@@ -4127,7 +3994,7 @@
       </p:sp>
       <p:sp>
         <p:nvSpPr>
-          <p:cNvPr id="102" name="Shape 100"/>
+          <p:cNvPr id="98" name="Shape 96"/>
           <p:cNvSpPr/>
           <p:nvPr/>
         </p:nvSpPr>
@@ -4159,7 +4026,7 @@
       </p:sp>
       <p:sp>
         <p:nvSpPr>
-          <p:cNvPr id="103" name="Text 101"/>
+          <p:cNvPr id="99" name="Text 97"/>
           <p:cNvSpPr/>
           <p:nvPr/>
         </p:nvSpPr>
@@ -4195,7 +4062,7 @@
       </p:sp>
       <p:sp>
         <p:nvSpPr>
-          <p:cNvPr id="104" name="Shape 102"/>
+          <p:cNvPr id="100" name="Shape 98"/>
           <p:cNvSpPr/>
           <p:nvPr/>
         </p:nvSpPr>
@@ -4222,7 +4089,7 @@
       </p:sp>
       <p:sp>
         <p:nvSpPr>
-          <p:cNvPr id="105" name="Text 103"/>
+          <p:cNvPr id="101" name="Text 99"/>
           <p:cNvSpPr/>
           <p:nvPr/>
         </p:nvSpPr>
@@ -4258,7 +4125,7 @@
       </p:sp>
       <p:sp>
         <p:nvSpPr>
-          <p:cNvPr id="106" name="Shape 104"/>
+          <p:cNvPr id="102" name="Shape 100"/>
           <p:cNvSpPr/>
           <p:nvPr/>
         </p:nvSpPr>
@@ -4283,7 +4150,7 @@
       </p:sp>
       <p:sp>
         <p:nvSpPr>
-          <p:cNvPr id="107" name="Shape 105"/>
+          <p:cNvPr id="103" name="Shape 101"/>
           <p:cNvSpPr/>
           <p:nvPr/>
         </p:nvSpPr>
@@ -4308,7 +4175,7 @@
       </p:sp>
       <p:sp>
         <p:nvSpPr>
-          <p:cNvPr id="108" name="Shape 106"/>
+          <p:cNvPr id="104" name="Shape 102"/>
           <p:cNvSpPr/>
           <p:nvPr/>
         </p:nvSpPr>
@@ -4333,7 +4200,7 @@
       </p:sp>
       <p:sp>
         <p:nvSpPr>
-          <p:cNvPr id="109" name="Text 107"/>
+          <p:cNvPr id="105" name="Text 103"/>
           <p:cNvSpPr/>
           <p:nvPr/>
         </p:nvSpPr>
@@ -4369,7 +4236,7 @@
       </p:sp>
       <p:sp>
         <p:nvSpPr>
-          <p:cNvPr id="110" name="Text 108"/>
+          <p:cNvPr id="106" name="Text 104"/>
           <p:cNvSpPr/>
           <p:nvPr/>
         </p:nvSpPr>
@@ -4405,7 +4272,7 @@
       </p:sp>
       <p:sp>
         <p:nvSpPr>
-          <p:cNvPr id="111" name="Shape 109"/>
+          <p:cNvPr id="107" name="Shape 105"/>
           <p:cNvSpPr/>
           <p:nvPr/>
         </p:nvSpPr>
@@ -4430,7 +4297,7 @@
       </p:sp>
       <p:sp>
         <p:nvSpPr>
-          <p:cNvPr id="112" name="Text 110"/>
+          <p:cNvPr id="108" name="Text 106"/>
           <p:cNvSpPr/>
           <p:nvPr/>
         </p:nvSpPr>
@@ -4466,7 +4333,7 @@
       </p:sp>
       <p:sp>
         <p:nvSpPr>
-          <p:cNvPr id="113" name="Text 111"/>
+          <p:cNvPr id="109" name="Text 107"/>
           <p:cNvSpPr/>
           <p:nvPr/>
         </p:nvSpPr>
@@ -4502,7 +4369,7 @@
       </p:sp>
       <p:sp>
         <p:nvSpPr>
-          <p:cNvPr id="114" name="Shape 112"/>
+          <p:cNvPr id="110" name="Shape 108"/>
           <p:cNvSpPr/>
           <p:nvPr/>
         </p:nvSpPr>
@@ -4527,7 +4394,7 @@
       </p:sp>
       <p:sp>
         <p:nvSpPr>
-          <p:cNvPr id="115" name="Text 113"/>
+          <p:cNvPr id="111" name="Text 109"/>
           <p:cNvSpPr/>
           <p:nvPr/>
         </p:nvSpPr>
@@ -4563,7 +4430,7 @@
       </p:sp>
       <p:sp>
         <p:nvSpPr>
-          <p:cNvPr id="116" name="Text 114"/>
+          <p:cNvPr id="112" name="Text 110"/>
           <p:cNvSpPr/>
           <p:nvPr/>
         </p:nvSpPr>
@@ -4599,7 +4466,7 @@
       </p:sp>
       <p:sp>
         <p:nvSpPr>
-          <p:cNvPr id="117" name="Shape 115"/>
+          <p:cNvPr id="113" name="Shape 111"/>
           <p:cNvSpPr/>
           <p:nvPr/>
         </p:nvSpPr>
@@ -4631,7 +4498,7 @@
       </p:sp>
       <p:sp>
         <p:nvSpPr>
-          <p:cNvPr id="118" name="Text 116"/>
+          <p:cNvPr id="114" name="Text 112"/>
           <p:cNvSpPr/>
           <p:nvPr/>
         </p:nvSpPr>
@@ -4667,7 +4534,7 @@
       </p:sp>
       <p:sp>
         <p:nvSpPr>
-          <p:cNvPr id="119" name="Shape 117"/>
+          <p:cNvPr id="115" name="Shape 113"/>
           <p:cNvSpPr/>
           <p:nvPr/>
         </p:nvSpPr>
@@ -4694,7 +4561,7 @@
       </p:sp>
       <p:sp>
         <p:nvSpPr>
-          <p:cNvPr id="120" name="Text 118"/>
+          <p:cNvPr id="116" name="Text 114"/>
           <p:cNvSpPr/>
           <p:nvPr/>
         </p:nvSpPr>
@@ -4730,7 +4597,7 @@
       </p:sp>
       <p:sp>
         <p:nvSpPr>
-          <p:cNvPr id="121" name="Shape 119"/>
+          <p:cNvPr id="117" name="Shape 115"/>
           <p:cNvSpPr/>
           <p:nvPr/>
         </p:nvSpPr>
@@ -4755,7 +4622,7 @@
       </p:sp>
       <p:sp>
         <p:nvSpPr>
-          <p:cNvPr id="122" name="Shape 120"/>
+          <p:cNvPr id="118" name="Shape 116"/>
           <p:cNvSpPr/>
           <p:nvPr/>
         </p:nvSpPr>
@@ -4780,7 +4647,7 @@
       </p:sp>
       <p:sp>
         <p:nvSpPr>
-          <p:cNvPr id="123" name="Shape 121"/>
+          <p:cNvPr id="119" name="Shape 117"/>
           <p:cNvSpPr/>
           <p:nvPr/>
         </p:nvSpPr>
@@ -4805,7 +4672,7 @@
       </p:sp>
       <p:sp>
         <p:nvSpPr>
-          <p:cNvPr id="124" name="Text 122"/>
+          <p:cNvPr id="120" name="Text 118"/>
           <p:cNvSpPr/>
           <p:nvPr/>
         </p:nvSpPr>
@@ -4841,7 +4708,7 @@
       </p:sp>
       <p:sp>
         <p:nvSpPr>
-          <p:cNvPr id="125" name="Text 123"/>
+          <p:cNvPr id="121" name="Text 119"/>
           <p:cNvSpPr/>
           <p:nvPr/>
         </p:nvSpPr>
@@ -4877,7 +4744,7 @@
       </p:sp>
       <p:sp>
         <p:nvSpPr>
-          <p:cNvPr id="126" name="Shape 124"/>
+          <p:cNvPr id="122" name="Shape 120"/>
           <p:cNvSpPr/>
           <p:nvPr/>
         </p:nvSpPr>
@@ -4902,7 +4769,7 @@
       </p:sp>
       <p:sp>
         <p:nvSpPr>
-          <p:cNvPr id="127" name="Text 125"/>
+          <p:cNvPr id="123" name="Text 121"/>
           <p:cNvSpPr/>
           <p:nvPr/>
         </p:nvSpPr>
@@ -4938,7 +4805,7 @@
       </p:sp>
       <p:sp>
         <p:nvSpPr>
-          <p:cNvPr id="128" name="Text 126"/>
+          <p:cNvPr id="124" name="Text 122"/>
           <p:cNvSpPr/>
           <p:nvPr/>
         </p:nvSpPr>
@@ -4974,7 +4841,7 @@
       </p:sp>
       <p:sp>
         <p:nvSpPr>
-          <p:cNvPr id="129" name="Shape 127"/>
+          <p:cNvPr id="125" name="Shape 123"/>
           <p:cNvSpPr/>
           <p:nvPr/>
         </p:nvSpPr>
@@ -4999,7 +4866,7 @@
       </p:sp>
       <p:sp>
         <p:nvSpPr>
-          <p:cNvPr id="130" name="Text 128"/>
+          <p:cNvPr id="126" name="Text 124"/>
           <p:cNvSpPr/>
           <p:nvPr/>
         </p:nvSpPr>
@@ -5035,7 +4902,7 @@
       </p:sp>
       <p:sp>
         <p:nvSpPr>
-          <p:cNvPr id="131" name="Text 129"/>
+          <p:cNvPr id="127" name="Text 125"/>
           <p:cNvSpPr/>
           <p:nvPr/>
         </p:nvSpPr>
@@ -5071,7 +4938,7 @@
       </p:sp>
       <p:sp>
         <p:nvSpPr>
-          <p:cNvPr id="132" name="Shape 130"/>
+          <p:cNvPr id="128" name="Shape 126"/>
           <p:cNvSpPr/>
           <p:nvPr/>
         </p:nvSpPr>
@@ -5103,7 +4970,7 @@
       </p:sp>
       <p:sp>
         <p:nvSpPr>
-          <p:cNvPr id="133" name="Text 131"/>
+          <p:cNvPr id="129" name="Text 127"/>
           <p:cNvSpPr/>
           <p:nvPr/>
         </p:nvSpPr>
@@ -5139,7 +5006,7 @@
       </p:sp>
       <p:sp>
         <p:nvSpPr>
-          <p:cNvPr id="134" name="Text 132"/>
+          <p:cNvPr id="130" name="Text 128"/>
           <p:cNvSpPr/>
           <p:nvPr/>
         </p:nvSpPr>
@@ -5175,7 +5042,7 @@
       </p:sp>
       <p:sp>
         <p:nvSpPr>
-          <p:cNvPr id="135" name="Text 133"/>
+          <p:cNvPr id="131" name="Text 129"/>
           <p:cNvSpPr/>
           <p:nvPr/>
         </p:nvSpPr>
@@ -5211,7 +5078,7 @@
       </p:sp>
       <p:sp>
         <p:nvSpPr>
-          <p:cNvPr id="136" name="Text 134"/>
+          <p:cNvPr id="132" name="Text 130"/>
           <p:cNvSpPr/>
           <p:nvPr/>
         </p:nvSpPr>
@@ -5247,7 +5114,7 @@
       </p:sp>
       <p:sp>
         <p:nvSpPr>
-          <p:cNvPr id="137" name="Shape 135"/>
+          <p:cNvPr id="133" name="Shape 131"/>
           <p:cNvSpPr/>
           <p:nvPr/>
         </p:nvSpPr>
@@ -5272,7 +5139,7 @@
       </p:sp>
       <p:sp>
         <p:nvSpPr>
-          <p:cNvPr id="138" name="Text 136"/>
+          <p:cNvPr id="134" name="Text 132"/>
           <p:cNvSpPr/>
           <p:nvPr/>
         </p:nvSpPr>
@@ -5308,7 +5175,7 @@
       </p:sp>
       <p:sp>
         <p:nvSpPr>
-          <p:cNvPr id="139" name="Text 137"/>
+          <p:cNvPr id="135" name="Text 133"/>
           <p:cNvSpPr/>
           <p:nvPr/>
         </p:nvSpPr>
@@ -5344,7 +5211,7 @@
       </p:sp>
       <p:sp>
         <p:nvSpPr>
-          <p:cNvPr id="140" name="Text 138"/>
+          <p:cNvPr id="136" name="Text 134"/>
           <p:cNvSpPr/>
           <p:nvPr/>
         </p:nvSpPr>
@@ -5380,7 +5247,7 @@
       </p:sp>
       <p:sp>
         <p:nvSpPr>
-          <p:cNvPr id="141" name="Shape 139"/>
+          <p:cNvPr id="137" name="Shape 135"/>
           <p:cNvSpPr/>
           <p:nvPr/>
         </p:nvSpPr>
@@ -5405,7 +5272,7 @@
       </p:sp>
       <p:sp>
         <p:nvSpPr>
-          <p:cNvPr id="142" name="Text 140"/>
+          <p:cNvPr id="138" name="Text 136"/>
           <p:cNvSpPr/>
           <p:nvPr/>
         </p:nvSpPr>
@@ -5441,7 +5308,7 @@
       </p:sp>
       <p:sp>
         <p:nvSpPr>
-          <p:cNvPr id="143" name="Text 141"/>
+          <p:cNvPr id="139" name="Text 137"/>
           <p:cNvSpPr/>
           <p:nvPr/>
         </p:nvSpPr>
@@ -5477,7 +5344,7 @@
       </p:sp>
       <p:sp>
         <p:nvSpPr>
-          <p:cNvPr id="144" name="Text 142"/>
+          <p:cNvPr id="140" name="Text 138"/>
           <p:cNvSpPr/>
           <p:nvPr/>
         </p:nvSpPr>
@@ -5513,7 +5380,7 @@
       </p:sp>
       <p:sp>
         <p:nvSpPr>
-          <p:cNvPr id="145" name="Shape 143"/>
+          <p:cNvPr id="141" name="Shape 139"/>
           <p:cNvSpPr/>
           <p:nvPr/>
         </p:nvSpPr>
@@ -5538,7 +5405,7 @@
       </p:sp>
       <p:sp>
         <p:nvSpPr>
-          <p:cNvPr id="146" name="Text 144"/>
+          <p:cNvPr id="142" name="Text 140"/>
           <p:cNvSpPr/>
           <p:nvPr/>
         </p:nvSpPr>
@@ -5574,7 +5441,7 @@
       </p:sp>
       <p:sp>
         <p:nvSpPr>
-          <p:cNvPr id="147" name="Text 145"/>
+          <p:cNvPr id="143" name="Text 141"/>
           <p:cNvSpPr/>
           <p:nvPr/>
         </p:nvSpPr>
@@ -5610,7 +5477,7 @@
       </p:sp>
       <p:sp>
         <p:nvSpPr>
-          <p:cNvPr id="148" name="Text 146"/>
+          <p:cNvPr id="144" name="Text 142"/>
           <p:cNvSpPr/>
           <p:nvPr/>
         </p:nvSpPr>
@@ -5646,7 +5513,7 @@
       </p:sp>
       <p:sp>
         <p:nvSpPr>
-          <p:cNvPr id="149" name="Text 147"/>
+          <p:cNvPr id="145" name="Text 143"/>
           <p:cNvSpPr/>
           <p:nvPr/>
         </p:nvSpPr>
@@ -5682,7 +5549,7 @@
       </p:sp>
       <p:sp>
         <p:nvSpPr>
-          <p:cNvPr id="150" name="Shape 148"/>
+          <p:cNvPr id="146" name="Shape 144"/>
           <p:cNvSpPr/>
           <p:nvPr/>
         </p:nvSpPr>
@@ -5695,11 +5562,11 @@
             <a:avLst/>
           </a:prstGeom>
           <a:solidFill>
-            <a:srgbClr val="FFF1F2"/>
-          </a:solidFill>
-          <a:ln w="12700">
-            <a:solidFill>
-              <a:srgbClr val="DC2626"/>
+            <a:srgbClr val="F0FDF4"/>
+          </a:solidFill>
+          <a:ln w="12700">
+            <a:solidFill>
+              <a:srgbClr val="1D9E75"/>
             </a:solidFill>
             <a:prstDash val="solid"/>
           </a:ln>
@@ -5714,7 +5581,7 @@
       </p:sp>
       <p:sp>
         <p:nvSpPr>
-          <p:cNvPr id="151" name="Text 149"/>
+          <p:cNvPr id="147" name="Text 145"/>
           <p:cNvSpPr/>
           <p:nvPr/>
         </p:nvSpPr>
@@ -5739,10 +5606,10 @@
             <a:r>
               <a:rPr lang="en-US" sz="700" b="1" dirty="0">
                 <a:solidFill>
-                  <a:srgbClr val="DC2626"/>
-                </a:solidFill>
-              </a:rPr>
-              <a:t>RISCO ATIVO</a:t>
+                  <a:srgbClr val="1D9E75"/>
+                </a:solidFill>
+              </a:rPr>
+              <a:t>SEM RISCO</a:t>
             </a:r>
             <a:endParaRPr lang="en-US" sz="700" dirty="0"/>
           </a:p>
@@ -5750,7 +5617,7 @@
       </p:sp>
       <p:sp>
         <p:nvSpPr>
-          <p:cNvPr id="152" name="Shape 150"/>
+          <p:cNvPr id="148" name="Shape 146"/>
           <p:cNvSpPr/>
           <p:nvPr/>
         </p:nvSpPr>
@@ -5763,19 +5630,19 @@
             <a:avLst/>
           </a:prstGeom>
           <a:solidFill>
-            <a:srgbClr val="DC2626"/>
-          </a:solidFill>
-          <a:ln w="12700">
-            <a:solidFill>
-              <a:srgbClr val="DC2626"/>
-            </a:solidFill>
-            <a:prstDash val="solid"/>
-          </a:ln>
-        </p:spPr>
-      </p:sp>
-      <p:sp>
-        <p:nvSpPr>
-          <p:cNvPr id="153" name="Text 151"/>
+            <a:srgbClr val="1D9E75"/>
+          </a:solidFill>
+          <a:ln w="12700">
+            <a:solidFill>
+              <a:srgbClr val="1D9E75"/>
+            </a:solidFill>
+            <a:prstDash val="solid"/>
+          </a:ln>
+        </p:spPr>
+      </p:sp>
+      <p:sp>
+        <p:nvSpPr>
+          <p:cNvPr id="149" name="Text 147"/>
           <p:cNvSpPr/>
           <p:nvPr/>
         </p:nvSpPr>
@@ -5803,7 +5670,7 @@
                   <a:srgbClr val="FFFFFF"/>
                 </a:solidFill>
               </a:rPr>
-              <a:t>1</a:t>
+              <a:t>0</a:t>
             </a:r>
             <a:endParaRPr lang="en-US" sz="650" dirty="0"/>
           </a:p>
@@ -5817,7 +5684,7 @@
                   <a:srgbClr val="FFFFFF"/>
                 </a:solidFill>
               </a:rPr>
-              <a:t>estouros</a:t>
+              <a:t>riscos</a:t>
             </a:r>
             <a:endParaRPr lang="en-US" sz="650" dirty="0"/>
           </a:p>
@@ -5825,7 +5692,7 @@
       </p:sp>
       <p:sp>
         <p:nvSpPr>
-          <p:cNvPr id="154" name="Text 152"/>
+          <p:cNvPr id="150" name="Text 148"/>
           <p:cNvSpPr/>
           <p:nvPr/>
         </p:nvSpPr>
@@ -5853,7 +5720,7 @@
                   <a:srgbClr val="222222"/>
                 </a:solidFill>
               </a:rPr>
-              <a:t>#404989 +3h(+300%) [RICARDO FERNANDES CARDOSO]</a:t>
+              <a:t>Nenhum estouro ou refinamento pendente</a:t>
             </a:r>
             <a:endParaRPr lang="en-US" sz="750" dirty="0"/>
           </a:p>
@@ -5861,7 +5728,7 @@
       </p:sp>
       <p:sp>
         <p:nvSpPr>
-          <p:cNvPr id="155" name="Text 153"/>
+          <p:cNvPr id="151" name="Text 149"/>
           <p:cNvSpPr/>
           <p:nvPr/>
         </p:nvSpPr>
@@ -5889,7 +5756,7 @@
       </p:sp>
       <p:sp>
         <p:nvSpPr>
-          <p:cNvPr id="156" name="Shape 154"/>
+          <p:cNvPr id="152" name="Shape 150"/>
           <p:cNvSpPr/>
           <p:nvPr/>
         </p:nvSpPr>
@@ -5921,7 +5788,7 @@
       </p:sp>
       <p:sp>
         <p:nvSpPr>
-          <p:cNvPr id="157" name="Text 155"/>
+          <p:cNvPr id="153" name="Text 151"/>
           <p:cNvSpPr/>
           <p:nvPr/>
         </p:nvSpPr>
@@ -5957,7 +5824,7 @@
       </p:sp>
       <p:sp>
         <p:nvSpPr>
-          <p:cNvPr id="158" name="Shape 156"/>
+          <p:cNvPr id="154" name="Shape 152"/>
           <p:cNvSpPr/>
           <p:nvPr/>
         </p:nvSpPr>
@@ -5982,7 +5849,7 @@
       </p:sp>
       <p:sp>
         <p:nvSpPr>
-          <p:cNvPr id="159" name="Text 157"/>
+          <p:cNvPr id="155" name="Text 153"/>
           <p:cNvSpPr/>
           <p:nvPr/>
         </p:nvSpPr>
@@ -6032,7 +5899,7 @@
       </p:sp>
       <p:sp>
         <p:nvSpPr>
-          <p:cNvPr id="160" name="Text 158"/>
+          <p:cNvPr id="156" name="Text 154"/>
           <p:cNvSpPr/>
           <p:nvPr/>
         </p:nvSpPr>
@@ -6068,7 +5935,7 @@
       </p:sp>
       <p:sp>
         <p:nvSpPr>
-          <p:cNvPr id="161" name="Text 159"/>
+          <p:cNvPr id="157" name="Text 155"/>
           <p:cNvSpPr/>
           <p:nvPr/>
         </p:nvSpPr>
@@ -6096,7 +5963,7 @@
       </p:sp>
       <p:sp>
         <p:nvSpPr>
-          <p:cNvPr id="162" name="Shape 160"/>
+          <p:cNvPr id="158" name="Shape 156"/>
           <p:cNvSpPr/>
           <p:nvPr/>
         </p:nvSpPr>
@@ -6128,7 +5995,7 @@
       </p:sp>
       <p:sp>
         <p:nvSpPr>
-          <p:cNvPr id="163" name="Text 161"/>
+          <p:cNvPr id="159" name="Text 157"/>
           <p:cNvSpPr/>
           <p:nvPr/>
         </p:nvSpPr>
@@ -6164,7 +6031,7 @@
       </p:sp>
       <p:sp>
         <p:nvSpPr>
-          <p:cNvPr id="164" name="Shape 162"/>
+          <p:cNvPr id="160" name="Shape 158"/>
           <p:cNvSpPr/>
           <p:nvPr/>
         </p:nvSpPr>
@@ -6189,7 +6056,7 @@
       </p:sp>
       <p:sp>
         <p:nvSpPr>
-          <p:cNvPr id="165" name="Text 163"/>
+          <p:cNvPr id="161" name="Text 159"/>
           <p:cNvSpPr/>
           <p:nvPr/>
         </p:nvSpPr>
@@ -6239,7 +6106,7 @@
       </p:sp>
       <p:sp>
         <p:nvSpPr>
-          <p:cNvPr id="166" name="Text 164"/>
+          <p:cNvPr id="162" name="Text 160"/>
           <p:cNvSpPr/>
           <p:nvPr/>
         </p:nvSpPr>
@@ -6275,7 +6142,7 @@
       </p:sp>
       <p:sp>
         <p:nvSpPr>
-          <p:cNvPr id="167" name="Text 165"/>
+          <p:cNvPr id="163" name="Text 161"/>
           <p:cNvSpPr/>
           <p:nvPr/>
         </p:nvSpPr>
@@ -6311,7 +6178,7 @@
       </p:sp>
       <p:sp>
         <p:nvSpPr>
-          <p:cNvPr id="168" name="Shape 166"/>
+          <p:cNvPr id="164" name="Shape 162"/>
           <p:cNvSpPr/>
           <p:nvPr/>
         </p:nvSpPr>
@@ -6343,7 +6210,7 @@
       </p:sp>
       <p:sp>
         <p:nvSpPr>
-          <p:cNvPr id="169" name="Text 167"/>
+          <p:cNvPr id="165" name="Text 163"/>
           <p:cNvSpPr/>
           <p:nvPr/>
         </p:nvSpPr>
@@ -6379,7 +6246,7 @@
       </p:sp>
       <p:sp>
         <p:nvSpPr>
-          <p:cNvPr id="170" name="Shape 168"/>
+          <p:cNvPr id="166" name="Shape 164"/>
           <p:cNvSpPr/>
           <p:nvPr/>
         </p:nvSpPr>
@@ -6404,7 +6271,7 @@
       </p:sp>
       <p:sp>
         <p:nvSpPr>
-          <p:cNvPr id="171" name="Text 169"/>
+          <p:cNvPr id="167" name="Text 165"/>
           <p:cNvSpPr/>
           <p:nvPr/>
         </p:nvSpPr>
@@ -6454,7 +6321,7 @@
       </p:sp>
       <p:sp>
         <p:nvSpPr>
-          <p:cNvPr id="172" name="Text 170"/>
+          <p:cNvPr id="168" name="Text 166"/>
           <p:cNvSpPr/>
           <p:nvPr/>
         </p:nvSpPr>
@@ -6490,7 +6357,7 @@
       </p:sp>
       <p:sp>
         <p:nvSpPr>
-          <p:cNvPr id="173" name="Text 171"/>
+          <p:cNvPr id="169" name="Text 167"/>
           <p:cNvSpPr/>
           <p:nvPr/>
         </p:nvSpPr>
@@ -6526,7 +6393,7 @@
       </p:sp>
       <p:sp>
         <p:nvSpPr>
-          <p:cNvPr id="174" name="Shape 172"/>
+          <p:cNvPr id="170" name="Shape 168"/>
           <p:cNvSpPr/>
           <p:nvPr/>
         </p:nvSpPr>
@@ -6551,7 +6418,7 @@
       </p:sp>
       <p:sp>
         <p:nvSpPr>
-          <p:cNvPr id="175" name="Text 173"/>
+          <p:cNvPr id="171" name="Text 169"/>
           <p:cNvSpPr/>
           <p:nvPr/>
         </p:nvSpPr>
@@ -6587,7 +6454,7 @@
       </p:sp>
       <p:sp>
         <p:nvSpPr>
-          <p:cNvPr id="176" name="Shape 174"/>
+          <p:cNvPr id="172" name="Shape 170"/>
           <p:cNvSpPr/>
           <p:nvPr/>
         </p:nvSpPr>
@@ -6612,7 +6479,7 @@
       </p:sp>
       <p:sp>
         <p:nvSpPr>
-          <p:cNvPr id="177" name="Text 175"/>
+          <p:cNvPr id="173" name="Text 171"/>
           <p:cNvSpPr/>
           <p:nvPr/>
         </p:nvSpPr>
@@ -6648,7 +6515,7 @@
       </p:sp>
       <p:sp>
         <p:nvSpPr>
-          <p:cNvPr id="178" name="Shape 176"/>
+          <p:cNvPr id="174" name="Shape 172"/>
           <p:cNvSpPr/>
           <p:nvPr/>
         </p:nvSpPr>
@@ -6673,7 +6540,7 @@
       </p:sp>
       <p:sp>
         <p:nvSpPr>
-          <p:cNvPr id="179" name="Text 177"/>
+          <p:cNvPr id="175" name="Text 173"/>
           <p:cNvSpPr/>
           <p:nvPr/>
         </p:nvSpPr>
@@ -6709,7 +6576,7 @@
       </p:sp>
       <p:sp>
         <p:nvSpPr>
-          <p:cNvPr id="180" name="Shape 178"/>
+          <p:cNvPr id="176" name="Shape 174"/>
           <p:cNvSpPr/>
           <p:nvPr/>
         </p:nvSpPr>
@@ -6741,7 +6608,7 @@
       </p:sp>
       <p:sp>
         <p:nvSpPr>
-          <p:cNvPr id="181" name="Text 179"/>
+          <p:cNvPr id="177" name="Text 175"/>
           <p:cNvSpPr/>
           <p:nvPr/>
         </p:nvSpPr>
@@ -6777,7 +6644,7 @@
       </p:sp>
       <p:sp>
         <p:nvSpPr>
-          <p:cNvPr id="182" name="Shape 180"/>
+          <p:cNvPr id="178" name="Shape 176"/>
           <p:cNvSpPr/>
           <p:nvPr/>
         </p:nvSpPr>
@@ -6802,7 +6669,7 @@
       </p:sp>
       <p:sp>
         <p:nvSpPr>
-          <p:cNvPr id="183" name="Shape 181"/>
+          <p:cNvPr id="179" name="Shape 177"/>
           <p:cNvSpPr/>
           <p:nvPr/>
         </p:nvSpPr>
@@ -6827,7 +6694,7 @@
       </p:sp>
       <p:sp>
         <p:nvSpPr>
-          <p:cNvPr id="184" name="Text 182"/>
+          <p:cNvPr id="180" name="Text 178"/>
           <p:cNvSpPr/>
           <p:nvPr/>
         </p:nvSpPr>
@@ -6863,7 +6730,7 @@
       </p:sp>
       <p:sp>
         <p:nvSpPr>
-          <p:cNvPr id="185" name="Text 183"/>
+          <p:cNvPr id="181" name="Text 179"/>
           <p:cNvSpPr/>
           <p:nvPr/>
         </p:nvSpPr>
@@ -6899,7 +6766,7 @@
       </p:sp>
       <p:sp>
         <p:nvSpPr>
-          <p:cNvPr id="186" name="Shape 184"/>
+          <p:cNvPr id="182" name="Shape 180"/>
           <p:cNvSpPr/>
           <p:nvPr/>
         </p:nvSpPr>
@@ -6924,7 +6791,7 @@
       </p:sp>
       <p:sp>
         <p:nvSpPr>
-          <p:cNvPr id="187" name="Text 185"/>
+          <p:cNvPr id="183" name="Text 181"/>
           <p:cNvSpPr/>
           <p:nvPr/>
         </p:nvSpPr>
@@ -6960,7 +6827,7 @@
       </p:sp>
       <p:sp>
         <p:nvSpPr>
-          <p:cNvPr id="188" name="Shape 186"/>
+          <p:cNvPr id="184" name="Shape 182"/>
           <p:cNvSpPr/>
           <p:nvPr/>
         </p:nvSpPr>
@@ -6992,7 +6859,7 @@
       </p:sp>
       <p:sp>
         <p:nvSpPr>
-          <p:cNvPr id="189" name="Text 187"/>
+          <p:cNvPr id="185" name="Text 183"/>
           <p:cNvSpPr/>
           <p:nvPr/>
         </p:nvSpPr>
@@ -7028,7 +6895,7 @@
       </p:sp>
       <p:sp>
         <p:nvSpPr>
-          <p:cNvPr id="190" name="Shape 188"/>
+          <p:cNvPr id="186" name="Shape 184"/>
           <p:cNvSpPr/>
           <p:nvPr/>
         </p:nvSpPr>
@@ -7053,7 +6920,7 @@
       </p:sp>
       <p:sp>
         <p:nvSpPr>
-          <p:cNvPr id="191" name="Shape 189"/>
+          <p:cNvPr id="187" name="Shape 185"/>
           <p:cNvSpPr/>
           <p:nvPr/>
         </p:nvSpPr>
@@ -7078,7 +6945,7 @@
       </p:sp>
       <p:sp>
         <p:nvSpPr>
-          <p:cNvPr id="192" name="Text 190"/>
+          <p:cNvPr id="188" name="Text 186"/>
           <p:cNvSpPr/>
           <p:nvPr/>
         </p:nvSpPr>
@@ -7114,7 +6981,7 @@
       </p:sp>
       <p:sp>
         <p:nvSpPr>
-          <p:cNvPr id="193" name="Text 191"/>
+          <p:cNvPr id="189" name="Text 187"/>
           <p:cNvSpPr/>
           <p:nvPr/>
         </p:nvSpPr>
@@ -7142,7 +7009,7 @@
                   <a:srgbClr val="888888"/>
                 </a:solidFill>
               </a:rPr>
-              <a:t>151.5h estimadas</a:t>
+              <a:t>157.5h estimadas</a:t>
             </a:r>
             <a:endParaRPr lang="en-US" sz="850" dirty="0"/>
           </a:p>
@@ -7150,7 +7017,7 @@
       </p:sp>
       <p:sp>
         <p:nvSpPr>
-          <p:cNvPr id="194" name="Shape 192"/>
+          <p:cNvPr id="190" name="Shape 188"/>
           <p:cNvSpPr/>
           <p:nvPr/>
         </p:nvSpPr>
@@ -7175,7 +7042,7 @@
       </p:sp>
       <p:sp>
         <p:nvSpPr>
-          <p:cNvPr id="195" name="Text 193"/>
+          <p:cNvPr id="191" name="Text 189"/>
           <p:cNvSpPr/>
           <p:nvPr/>
         </p:nvSpPr>
@@ -7211,7 +7078,7 @@
       </p:sp>
       <p:sp>
         <p:nvSpPr>
-          <p:cNvPr id="196" name="Shape 194"/>
+          <p:cNvPr id="192" name="Shape 190"/>
           <p:cNvSpPr/>
           <p:nvPr/>
         </p:nvSpPr>
@@ -7243,7 +7110,7 @@
       </p:sp>
       <p:sp>
         <p:nvSpPr>
-          <p:cNvPr id="197" name="Text 195"/>
+          <p:cNvPr id="193" name="Text 191"/>
           <p:cNvSpPr/>
           <p:nvPr/>
         </p:nvSpPr>
@@ -7279,7 +7146,7 @@
       </p:sp>
       <p:sp>
         <p:nvSpPr>
-          <p:cNvPr id="198" name="Shape 196"/>
+          <p:cNvPr id="194" name="Shape 192"/>
           <p:cNvSpPr/>
           <p:nvPr/>
         </p:nvSpPr>
@@ -7304,7 +7171,7 @@
       </p:sp>
       <p:sp>
         <p:nvSpPr>
-          <p:cNvPr id="199" name="Shape 197"/>
+          <p:cNvPr id="195" name="Shape 193"/>
           <p:cNvSpPr/>
           <p:nvPr/>
         </p:nvSpPr>
@@ -7329,7 +7196,7 @@
       </p:sp>
       <p:sp>
         <p:nvSpPr>
-          <p:cNvPr id="200" name="Text 198"/>
+          <p:cNvPr id="196" name="Text 194"/>
           <p:cNvSpPr/>
           <p:nvPr/>
         </p:nvSpPr>
@@ -7365,7 +7232,7 @@
       </p:sp>
       <p:sp>
         <p:nvSpPr>
-          <p:cNvPr id="201" name="Text 199"/>
+          <p:cNvPr id="197" name="Text 195"/>
           <p:cNvSpPr/>
           <p:nvPr/>
         </p:nvSpPr>
@@ -7401,7 +7268,7 @@
       </p:sp>
       <p:sp>
         <p:nvSpPr>
-          <p:cNvPr id="202" name="Shape 200"/>
+          <p:cNvPr id="198" name="Shape 196"/>
           <p:cNvSpPr/>
           <p:nvPr/>
         </p:nvSpPr>
@@ -7426,7 +7293,7 @@
       </p:sp>
       <p:sp>
         <p:nvSpPr>
-          <p:cNvPr id="203" name="Text 201"/>
+          <p:cNvPr id="199" name="Text 197"/>
           <p:cNvSpPr/>
           <p:nvPr/>
         </p:nvSpPr>
@@ -7462,7 +7329,7 @@
       </p:sp>
       <p:sp>
         <p:nvSpPr>
-          <p:cNvPr id="204" name="Shape 202"/>
+          <p:cNvPr id="200" name="Shape 198"/>
           <p:cNvSpPr/>
           <p:nvPr/>
         </p:nvSpPr>
@@ -7494,7 +7361,7 @@
       </p:sp>
       <p:sp>
         <p:nvSpPr>
-          <p:cNvPr id="205" name="Text 203"/>
+          <p:cNvPr id="201" name="Text 199"/>
           <p:cNvSpPr/>
           <p:nvPr/>
         </p:nvSpPr>
@@ -7530,7 +7397,7 @@
       </p:sp>
       <p:sp>
         <p:nvSpPr>
-          <p:cNvPr id="206" name="Shape 204"/>
+          <p:cNvPr id="202" name="Shape 200"/>
           <p:cNvSpPr/>
           <p:nvPr/>
         </p:nvSpPr>
@@ -7555,7 +7422,7 @@
       </p:sp>
       <p:sp>
         <p:nvSpPr>
-          <p:cNvPr id="207" name="Shape 205"/>
+          <p:cNvPr id="203" name="Shape 201"/>
           <p:cNvSpPr/>
           <p:nvPr/>
         </p:nvSpPr>
@@ -7580,7 +7447,7 @@
       </p:sp>
       <p:sp>
         <p:nvSpPr>
-          <p:cNvPr id="208" name="Text 206"/>
+          <p:cNvPr id="204" name="Text 202"/>
           <p:cNvSpPr/>
           <p:nvPr/>
         </p:nvSpPr>
@@ -7616,7 +7483,7 @@
       </p:sp>
       <p:sp>
         <p:nvSpPr>
-          <p:cNvPr id="209" name="Text 207"/>
+          <p:cNvPr id="205" name="Text 203"/>
           <p:cNvSpPr/>
           <p:nvPr/>
         </p:nvSpPr>
@@ -7652,7 +7519,7 @@
       </p:sp>
       <p:sp>
         <p:nvSpPr>
-          <p:cNvPr id="210" name="Shape 208"/>
+          <p:cNvPr id="206" name="Shape 204"/>
           <p:cNvSpPr/>
           <p:nvPr/>
         </p:nvSpPr>
@@ -7684,7 +7551,7 @@
       </p:sp>
       <p:sp>
         <p:nvSpPr>
-          <p:cNvPr id="211" name="Text 209"/>
+          <p:cNvPr id="207" name="Text 205"/>
           <p:cNvSpPr/>
           <p:nvPr/>
         </p:nvSpPr>
@@ -7720,7 +7587,7 @@
       </p:sp>
       <p:sp>
         <p:nvSpPr>
-          <p:cNvPr id="212" name="Shape 210"/>
+          <p:cNvPr id="208" name="Shape 206"/>
           <p:cNvSpPr/>
           <p:nvPr/>
         </p:nvSpPr>
@@ -7745,7 +7612,7 @@
       </p:sp>
       <p:sp>
         <p:nvSpPr>
-          <p:cNvPr id="213" name="Shape 211"/>
+          <p:cNvPr id="209" name="Shape 207"/>
           <p:cNvSpPr/>
           <p:nvPr/>
         </p:nvSpPr>
@@ -7770,7 +7637,7 @@
       </p:sp>
       <p:sp>
         <p:nvSpPr>
-          <p:cNvPr id="214" name="Text 212"/>
+          <p:cNvPr id="210" name="Text 208"/>
           <p:cNvSpPr/>
           <p:nvPr/>
         </p:nvSpPr>
@@ -7806,7 +7673,7 @@
       </p:sp>
       <p:sp>
         <p:nvSpPr>
-          <p:cNvPr id="215" name="Text 213"/>
+          <p:cNvPr id="211" name="Text 209"/>
           <p:cNvSpPr/>
           <p:nvPr/>
         </p:nvSpPr>
@@ -7842,7 +7709,7 @@
       </p:sp>
       <p:sp>
         <p:nvSpPr>
-          <p:cNvPr id="216" name="Shape 214"/>
+          <p:cNvPr id="212" name="Shape 210"/>
           <p:cNvSpPr/>
           <p:nvPr/>
         </p:nvSpPr>
@@ -7867,7 +7734,7 @@
       </p:sp>
       <p:sp>
         <p:nvSpPr>
-          <p:cNvPr id="217" name="Text 215"/>
+          <p:cNvPr id="213" name="Text 211"/>
           <p:cNvSpPr/>
           <p:nvPr/>
         </p:nvSpPr>
@@ -7903,7 +7770,7 @@
       </p:sp>
       <p:sp>
         <p:nvSpPr>
-          <p:cNvPr id="218" name="Shape 216"/>
+          <p:cNvPr id="214" name="Shape 212"/>
           <p:cNvSpPr/>
           <p:nvPr/>
         </p:nvSpPr>
@@ -7935,7 +7802,7 @@
       </p:sp>
       <p:sp>
         <p:nvSpPr>
-          <p:cNvPr id="219" name="Text 217"/>
+          <p:cNvPr id="215" name="Text 213"/>
           <p:cNvSpPr/>
           <p:nvPr/>
         </p:nvSpPr>
@@ -7971,7 +7838,7 @@
       </p:sp>
       <p:sp>
         <p:nvSpPr>
-          <p:cNvPr id="220" name="Shape 218"/>
+          <p:cNvPr id="216" name="Shape 214"/>
           <p:cNvSpPr/>
           <p:nvPr/>
         </p:nvSpPr>
@@ -7996,7 +7863,7 @@
       </p:sp>
       <p:sp>
         <p:nvSpPr>
-          <p:cNvPr id="221" name="Shape 219"/>
+          <p:cNvPr id="217" name="Shape 215"/>
           <p:cNvSpPr/>
           <p:nvPr/>
         </p:nvSpPr>
@@ -8021,7 +7888,7 @@
       </p:sp>
       <p:sp>
         <p:nvSpPr>
-          <p:cNvPr id="222" name="Text 220"/>
+          <p:cNvPr id="218" name="Text 216"/>
           <p:cNvSpPr/>
           <p:nvPr/>
         </p:nvSpPr>
@@ -8057,7 +7924,7 @@
       </p:sp>
       <p:sp>
         <p:nvSpPr>
-          <p:cNvPr id="223" name="Text 221"/>
+          <p:cNvPr id="219" name="Text 217"/>
           <p:cNvSpPr/>
           <p:nvPr/>
         </p:nvSpPr>
@@ -8093,7 +7960,7 @@
       </p:sp>
       <p:sp>
         <p:nvSpPr>
-          <p:cNvPr id="224" name="Shape 222"/>
+          <p:cNvPr id="220" name="Shape 218"/>
           <p:cNvSpPr/>
           <p:nvPr/>
         </p:nvSpPr>
@@ -8118,7 +7985,7 @@
       </p:sp>
       <p:sp>
         <p:nvSpPr>
-          <p:cNvPr id="225" name="Text 223"/>
+          <p:cNvPr id="221" name="Text 219"/>
           <p:cNvSpPr/>
           <p:nvPr/>
         </p:nvSpPr>
@@ -8154,7 +8021,7 @@
       </p:sp>
       <p:sp>
         <p:nvSpPr>
-          <p:cNvPr id="226" name="Shape 224"/>
+          <p:cNvPr id="222" name="Shape 220"/>
           <p:cNvSpPr/>
           <p:nvPr/>
         </p:nvSpPr>
@@ -8186,7 +8053,7 @@
       </p:sp>
       <p:sp>
         <p:nvSpPr>
-          <p:cNvPr id="227" name="Text 225"/>
+          <p:cNvPr id="223" name="Text 221"/>
           <p:cNvSpPr/>
           <p:nvPr/>
         </p:nvSpPr>
@@ -8222,7 +8089,7 @@
       </p:sp>
       <p:sp>
         <p:nvSpPr>
-          <p:cNvPr id="228" name="Shape 226"/>
+          <p:cNvPr id="224" name="Shape 222"/>
           <p:cNvSpPr/>
           <p:nvPr/>
         </p:nvSpPr>
@@ -8247,7 +8114,7 @@
       </p:sp>
       <p:sp>
         <p:nvSpPr>
-          <p:cNvPr id="229" name="Shape 227"/>
+          <p:cNvPr id="225" name="Shape 223"/>
           <p:cNvSpPr/>
           <p:nvPr/>
         </p:nvSpPr>
@@ -8272,7 +8139,7 @@
       </p:sp>
       <p:sp>
         <p:nvSpPr>
-          <p:cNvPr id="230" name="Text 228"/>
+          <p:cNvPr id="226" name="Text 224"/>
           <p:cNvSpPr/>
           <p:nvPr/>
         </p:nvSpPr>
@@ -8308,7 +8175,7 @@
       </p:sp>
       <p:sp>
         <p:nvSpPr>
-          <p:cNvPr id="231" name="Text 229"/>
+          <p:cNvPr id="227" name="Text 225"/>
           <p:cNvSpPr/>
           <p:nvPr/>
         </p:nvSpPr>
@@ -8344,7 +8211,7 @@
       </p:sp>
       <p:sp>
         <p:nvSpPr>
-          <p:cNvPr id="232" name="Shape 230"/>
+          <p:cNvPr id="228" name="Shape 226"/>
           <p:cNvSpPr/>
           <p:nvPr/>
         </p:nvSpPr>
@@ -8376,7 +8243,7 @@
       </p:sp>
       <p:sp>
         <p:nvSpPr>
-          <p:cNvPr id="233" name="Text 231"/>
+          <p:cNvPr id="229" name="Text 227"/>
           <p:cNvSpPr/>
           <p:nvPr/>
         </p:nvSpPr>
@@ -8412,7 +8279,7 @@
       </p:sp>
       <p:sp>
         <p:nvSpPr>
-          <p:cNvPr id="234" name="Shape 232"/>
+          <p:cNvPr id="230" name="Shape 228"/>
           <p:cNvSpPr/>
           <p:nvPr/>
         </p:nvSpPr>
@@ -8437,7 +8304,7 @@
       </p:sp>
       <p:sp>
         <p:nvSpPr>
-          <p:cNvPr id="235" name="Shape 233"/>
+          <p:cNvPr id="231" name="Shape 229"/>
           <p:cNvSpPr/>
           <p:nvPr/>
         </p:nvSpPr>
@@ -8462,7 +8329,7 @@
       </p:sp>
       <p:sp>
         <p:nvSpPr>
-          <p:cNvPr id="236" name="Text 234"/>
+          <p:cNvPr id="232" name="Text 230"/>
           <p:cNvSpPr/>
           <p:nvPr/>
         </p:nvSpPr>
@@ -8490,7 +8357,7 @@
                   <a:srgbClr val="1D9E75"/>
                 </a:solidFill>
               </a:rPr>
-              <a:t>124h · 87 subs finalizadas</a:t>
+              <a:t>124h · 88 subs finalizadas</a:t>
             </a:r>
             <a:endParaRPr lang="en-US" sz="950" dirty="0"/>
           </a:p>
@@ -8498,7 +8365,7 @@
       </p:sp>
       <p:sp>
         <p:nvSpPr>
-          <p:cNvPr id="237" name="Text 235"/>
+          <p:cNvPr id="233" name="Text 231"/>
           <p:cNvSpPr/>
           <p:nvPr/>
         </p:nvSpPr>
